--- a/docs/Apresentacao-Kaida.pptx
+++ b/docs/Apresentacao-Kaida.pptx
@@ -6824,7 +6824,7 @@
                 <a:ea typeface="Calibri" pitchFamily="34" charset="-122"/>
                 <a:cs typeface="Calibri" pitchFamily="34" charset="-120"/>
               </a:rPr>
-              <a:t>Nove estados, um arquivo cada</a:t>
+              <a:t>Oito estados, um arquivo cada</a:t>
             </a:r>
             <a:endParaRPr lang="en-US" sz="1500" dirty="0"/>
           </a:p>
